--- a/DemographicReactionEngine.pptx
+++ b/DemographicReactionEngine.pptx
@@ -5,16 +5,16 @@
     <p:sldMasterId id="2147483648" r:id="rId1"/>
   </p:sldMasterIdLst>
   <p:sldIdLst>
-    <p:sldId id="256" r:id="rId7"/>
-    <p:sldId id="257" r:id="rId8"/>
-    <p:sldId id="258" r:id="rId9"/>
-    <p:sldId id="259" r:id="rId10"/>
-    <p:sldId id="260" r:id="rId11"/>
-    <p:sldId id="261" r:id="rId12"/>
-    <p:sldId id="262" r:id="rId13"/>
-    <p:sldId id="263" r:id="rId14"/>
+    <p:sldId id="256" r:id="rId2"/>
+    <p:sldId id="257" r:id="rId3"/>
+    <p:sldId id="258" r:id="rId4"/>
+    <p:sldId id="259" r:id="rId5"/>
+    <p:sldId id="260" r:id="rId6"/>
+    <p:sldId id="261" r:id="rId7"/>
+    <p:sldId id="262" r:id="rId8"/>
+    <p:sldId id="263" r:id="rId9"/>
   </p:sldIdLst>
-  <p:sldSz cx="12191695" cy="6858000" type="screen4x3"/>
+  <p:sldSz cx="12192000" cy="6858000"/>
   <p:notesSz cx="6858000" cy="9144000"/>
   <p:defaultTextStyle>
     <a:defPPr>
@@ -111,6 +111,22 @@
       </a:defRPr>
     </a:lvl9pPr>
   </p:defaultTextStyle>
+  <p:extLst>
+    <p:ext uri="{EFAFB233-063F-42B5-8137-9DF3F51BA10A}">
+      <p15:sldGuideLst xmlns:p15="http://schemas.microsoft.com/office/powerpoint/2012/main">
+        <p15:guide id="1" orient="horz" pos="2160">
+          <p15:clr>
+            <a:srgbClr val="A4A3A4"/>
+          </p15:clr>
+        </p15:guide>
+        <p15:guide id="2" pos="2880">
+          <p15:clr>
+            <a:srgbClr val="A4A3A4"/>
+          </p15:clr>
+        </p15:guide>
+      </p15:sldGuideLst>
+    </p:ext>
+  </p:extLst>
 </p:presentation>
 </file>
 
@@ -152,10 +168,9 @@
           <a:lstStyle/>
           <a:p>
             <a:r>
-              <a:rPr lang="en-US" smtClean="0"/>
+              <a:rPr lang="en-US"/>
               <a:t>Click to edit Master title style</a:t>
             </a:r>
-            <a:endParaRPr lang="en-US"/>
           </a:p>
         </p:txBody>
       </p:sp>
@@ -271,10 +286,9 @@
           </a:lstStyle>
           <a:p>
             <a:r>
-              <a:rPr lang="en-US" smtClean="0"/>
+              <a:rPr lang="en-US"/>
               <a:t>Click to edit Master subtitle style</a:t>
             </a:r>
-            <a:endParaRPr lang="en-US"/>
           </a:p>
         </p:txBody>
       </p:sp>
@@ -295,7 +309,7 @@
           <a:p>
             <a:fld id="{5BCAD085-E8A6-8845-BD4E-CB4CCA059FC4}" type="datetimeFigureOut">
               <a:rPr lang="en-US" smtClean="0"/>
-              <a:t>1/27/13</a:t>
+              <a:t>5/23/26</a:t>
             </a:fld>
             <a:endParaRPr lang="en-US"/>
           </a:p>
@@ -389,10 +403,9 @@
           <a:lstStyle/>
           <a:p>
             <a:r>
-              <a:rPr lang="en-US" smtClean="0"/>
+              <a:rPr lang="en-US"/>
               <a:t>Click to edit Master title style</a:t>
             </a:r>
-            <a:endParaRPr lang="en-US"/>
           </a:p>
         </p:txBody>
       </p:sp>
@@ -413,38 +426,37 @@
           <a:p>
             <a:pPr lvl="0"/>
             <a:r>
-              <a:rPr lang="en-US" smtClean="0"/>
+              <a:rPr lang="en-US"/>
               <a:t>Click to edit Master text styles</a:t>
             </a:r>
           </a:p>
           <a:p>
             <a:pPr lvl="1"/>
             <a:r>
-              <a:rPr lang="en-US" smtClean="0"/>
+              <a:rPr lang="en-US"/>
               <a:t>Second level</a:t>
             </a:r>
           </a:p>
           <a:p>
             <a:pPr lvl="2"/>
             <a:r>
-              <a:rPr lang="en-US" smtClean="0"/>
+              <a:rPr lang="en-US"/>
               <a:t>Third level</a:t>
             </a:r>
           </a:p>
           <a:p>
             <a:pPr lvl="3"/>
             <a:r>
-              <a:rPr lang="en-US" smtClean="0"/>
+              <a:rPr lang="en-US"/>
               <a:t>Fourth level</a:t>
             </a:r>
           </a:p>
           <a:p>
             <a:pPr lvl="4"/>
             <a:r>
-              <a:rPr lang="en-US" smtClean="0"/>
+              <a:rPr lang="en-US"/>
               <a:t>Fifth level</a:t>
             </a:r>
-            <a:endParaRPr lang="en-US"/>
           </a:p>
         </p:txBody>
       </p:sp>
@@ -465,7 +477,7 @@
           <a:p>
             <a:fld id="{5BCAD085-E8A6-8845-BD4E-CB4CCA059FC4}" type="datetimeFigureOut">
               <a:rPr lang="en-US" smtClean="0"/>
-              <a:t>1/27/13</a:t>
+              <a:t>5/23/26</a:t>
             </a:fld>
             <a:endParaRPr lang="en-US"/>
           </a:p>
@@ -564,10 +576,9 @@
           <a:lstStyle/>
           <a:p>
             <a:r>
-              <a:rPr lang="en-US" smtClean="0"/>
+              <a:rPr lang="en-US"/>
               <a:t>Click to edit Master title style</a:t>
             </a:r>
-            <a:endParaRPr lang="en-US"/>
           </a:p>
         </p:txBody>
       </p:sp>
@@ -593,38 +604,37 @@
           <a:p>
             <a:pPr lvl="0"/>
             <a:r>
-              <a:rPr lang="en-US" smtClean="0"/>
+              <a:rPr lang="en-US"/>
               <a:t>Click to edit Master text styles</a:t>
             </a:r>
           </a:p>
           <a:p>
             <a:pPr lvl="1"/>
             <a:r>
-              <a:rPr lang="en-US" smtClean="0"/>
+              <a:rPr lang="en-US"/>
               <a:t>Second level</a:t>
             </a:r>
           </a:p>
           <a:p>
             <a:pPr lvl="2"/>
             <a:r>
-              <a:rPr lang="en-US" smtClean="0"/>
+              <a:rPr lang="en-US"/>
               <a:t>Third level</a:t>
             </a:r>
           </a:p>
           <a:p>
             <a:pPr lvl="3"/>
             <a:r>
-              <a:rPr lang="en-US" smtClean="0"/>
+              <a:rPr lang="en-US"/>
               <a:t>Fourth level</a:t>
             </a:r>
           </a:p>
           <a:p>
             <a:pPr lvl="4"/>
             <a:r>
-              <a:rPr lang="en-US" smtClean="0"/>
+              <a:rPr lang="en-US"/>
               <a:t>Fifth level</a:t>
             </a:r>
-            <a:endParaRPr lang="en-US"/>
           </a:p>
         </p:txBody>
       </p:sp>
@@ -645,7 +655,7 @@
           <a:p>
             <a:fld id="{5BCAD085-E8A6-8845-BD4E-CB4CCA059FC4}" type="datetimeFigureOut">
               <a:rPr lang="en-US" smtClean="0"/>
-              <a:t>1/27/13</a:t>
+              <a:t>5/23/26</a:t>
             </a:fld>
             <a:endParaRPr lang="en-US"/>
           </a:p>
@@ -739,10 +749,9 @@
           <a:lstStyle/>
           <a:p>
             <a:r>
-              <a:rPr lang="en-US" smtClean="0"/>
+              <a:rPr lang="en-US"/>
               <a:t>Click to edit Master title style</a:t>
             </a:r>
-            <a:endParaRPr lang="en-US"/>
           </a:p>
         </p:txBody>
       </p:sp>
@@ -763,38 +772,37 @@
           <a:p>
             <a:pPr lvl="0"/>
             <a:r>
-              <a:rPr lang="en-US" smtClean="0"/>
+              <a:rPr lang="en-US"/>
               <a:t>Click to edit Master text styles</a:t>
             </a:r>
           </a:p>
           <a:p>
             <a:pPr lvl="1"/>
             <a:r>
-              <a:rPr lang="en-US" smtClean="0"/>
+              <a:rPr lang="en-US"/>
               <a:t>Second level</a:t>
             </a:r>
           </a:p>
           <a:p>
             <a:pPr lvl="2"/>
             <a:r>
-              <a:rPr lang="en-US" smtClean="0"/>
+              <a:rPr lang="en-US"/>
               <a:t>Third level</a:t>
             </a:r>
           </a:p>
           <a:p>
             <a:pPr lvl="3"/>
             <a:r>
-              <a:rPr lang="en-US" smtClean="0"/>
+              <a:rPr lang="en-US"/>
               <a:t>Fourth level</a:t>
             </a:r>
           </a:p>
           <a:p>
             <a:pPr lvl="4"/>
             <a:r>
-              <a:rPr lang="en-US" smtClean="0"/>
+              <a:rPr lang="en-US"/>
               <a:t>Fifth level</a:t>
             </a:r>
-            <a:endParaRPr lang="en-US"/>
           </a:p>
         </p:txBody>
       </p:sp>
@@ -815,7 +823,7 @@
           <a:p>
             <a:fld id="{5BCAD085-E8A6-8845-BD4E-CB4CCA059FC4}" type="datetimeFigureOut">
               <a:rPr lang="en-US" smtClean="0"/>
-              <a:t>1/27/13</a:t>
+              <a:t>5/23/26</a:t>
             </a:fld>
             <a:endParaRPr lang="en-US"/>
           </a:p>
@@ -918,10 +926,9 @@
           </a:lstStyle>
           <a:p>
             <a:r>
-              <a:rPr lang="en-US" smtClean="0"/>
+              <a:rPr lang="en-US"/>
               <a:t>Click to edit Master title style</a:t>
             </a:r>
-            <a:endParaRPr lang="en-US"/>
           </a:p>
         </p:txBody>
       </p:sp>
@@ -1038,7 +1045,7 @@
           <a:p>
             <a:pPr lvl="0"/>
             <a:r>
-              <a:rPr lang="en-US" smtClean="0"/>
+              <a:rPr lang="en-US"/>
               <a:t>Click to edit Master text styles</a:t>
             </a:r>
           </a:p>
@@ -1061,7 +1068,7 @@
           <a:p>
             <a:fld id="{5BCAD085-E8A6-8845-BD4E-CB4CCA059FC4}" type="datetimeFigureOut">
               <a:rPr lang="en-US" smtClean="0"/>
-              <a:t>1/27/13</a:t>
+              <a:t>5/23/26</a:t>
             </a:fld>
             <a:endParaRPr lang="en-US"/>
           </a:p>
@@ -1155,10 +1162,9 @@
           <a:lstStyle/>
           <a:p>
             <a:r>
-              <a:rPr lang="en-US" smtClean="0"/>
+              <a:rPr lang="en-US"/>
               <a:t>Click to edit Master title style</a:t>
             </a:r>
-            <a:endParaRPr lang="en-US"/>
           </a:p>
         </p:txBody>
       </p:sp>
@@ -1212,38 +1218,37 @@
           <a:p>
             <a:pPr lvl="0"/>
             <a:r>
-              <a:rPr lang="en-US" smtClean="0"/>
+              <a:rPr lang="en-US"/>
               <a:t>Click to edit Master text styles</a:t>
             </a:r>
           </a:p>
           <a:p>
             <a:pPr lvl="1"/>
             <a:r>
-              <a:rPr lang="en-US" smtClean="0"/>
+              <a:rPr lang="en-US"/>
               <a:t>Second level</a:t>
             </a:r>
           </a:p>
           <a:p>
             <a:pPr lvl="2"/>
             <a:r>
-              <a:rPr lang="en-US" smtClean="0"/>
+              <a:rPr lang="en-US"/>
               <a:t>Third level</a:t>
             </a:r>
           </a:p>
           <a:p>
             <a:pPr lvl="3"/>
             <a:r>
-              <a:rPr lang="en-US" smtClean="0"/>
+              <a:rPr lang="en-US"/>
               <a:t>Fourth level</a:t>
             </a:r>
           </a:p>
           <a:p>
             <a:pPr lvl="4"/>
             <a:r>
-              <a:rPr lang="en-US" smtClean="0"/>
+              <a:rPr lang="en-US"/>
               <a:t>Fifth level</a:t>
             </a:r>
-            <a:endParaRPr lang="en-US"/>
           </a:p>
         </p:txBody>
       </p:sp>
@@ -1297,38 +1302,37 @@
           <a:p>
             <a:pPr lvl="0"/>
             <a:r>
-              <a:rPr lang="en-US" smtClean="0"/>
+              <a:rPr lang="en-US"/>
               <a:t>Click to edit Master text styles</a:t>
             </a:r>
           </a:p>
           <a:p>
             <a:pPr lvl="1"/>
             <a:r>
-              <a:rPr lang="en-US" smtClean="0"/>
+              <a:rPr lang="en-US"/>
               <a:t>Second level</a:t>
             </a:r>
           </a:p>
           <a:p>
             <a:pPr lvl="2"/>
             <a:r>
-              <a:rPr lang="en-US" smtClean="0"/>
+              <a:rPr lang="en-US"/>
               <a:t>Third level</a:t>
             </a:r>
           </a:p>
           <a:p>
             <a:pPr lvl="3"/>
             <a:r>
-              <a:rPr lang="en-US" smtClean="0"/>
+              <a:rPr lang="en-US"/>
               <a:t>Fourth level</a:t>
             </a:r>
           </a:p>
           <a:p>
             <a:pPr lvl="4"/>
             <a:r>
-              <a:rPr lang="en-US" smtClean="0"/>
+              <a:rPr lang="en-US"/>
               <a:t>Fifth level</a:t>
             </a:r>
-            <a:endParaRPr lang="en-US"/>
           </a:p>
         </p:txBody>
       </p:sp>
@@ -1349,7 +1353,7 @@
           <a:p>
             <a:fld id="{5BCAD085-E8A6-8845-BD4E-CB4CCA059FC4}" type="datetimeFigureOut">
               <a:rPr lang="en-US" smtClean="0"/>
-              <a:t>1/27/13</a:t>
+              <a:t>5/23/26</a:t>
             </a:fld>
             <a:endParaRPr lang="en-US"/>
           </a:p>
@@ -1447,10 +1451,9 @@
           </a:lstStyle>
           <a:p>
             <a:r>
-              <a:rPr lang="en-US" smtClean="0"/>
+              <a:rPr lang="en-US"/>
               <a:t>Click to edit Master title style</a:t>
             </a:r>
-            <a:endParaRPr lang="en-US"/>
           </a:p>
         </p:txBody>
       </p:sp>
@@ -1513,7 +1516,7 @@
           <a:p>
             <a:pPr lvl="0"/>
             <a:r>
-              <a:rPr lang="en-US" smtClean="0"/>
+              <a:rPr lang="en-US"/>
               <a:t>Click to edit Master text styles</a:t>
             </a:r>
           </a:p>
@@ -1569,38 +1572,37 @@
           <a:p>
             <a:pPr lvl="0"/>
             <a:r>
-              <a:rPr lang="en-US" smtClean="0"/>
+              <a:rPr lang="en-US"/>
               <a:t>Click to edit Master text styles</a:t>
             </a:r>
           </a:p>
           <a:p>
             <a:pPr lvl="1"/>
             <a:r>
-              <a:rPr lang="en-US" smtClean="0"/>
+              <a:rPr lang="en-US"/>
               <a:t>Second level</a:t>
             </a:r>
           </a:p>
           <a:p>
             <a:pPr lvl="2"/>
             <a:r>
-              <a:rPr lang="en-US" smtClean="0"/>
+              <a:rPr lang="en-US"/>
               <a:t>Third level</a:t>
             </a:r>
           </a:p>
           <a:p>
             <a:pPr lvl="3"/>
             <a:r>
-              <a:rPr lang="en-US" smtClean="0"/>
+              <a:rPr lang="en-US"/>
               <a:t>Fourth level</a:t>
             </a:r>
           </a:p>
           <a:p>
             <a:pPr lvl="4"/>
             <a:r>
-              <a:rPr lang="en-US" smtClean="0"/>
+              <a:rPr lang="en-US"/>
               <a:t>Fifth level</a:t>
             </a:r>
-            <a:endParaRPr lang="en-US"/>
           </a:p>
         </p:txBody>
       </p:sp>
@@ -1663,7 +1665,7 @@
           <a:p>
             <a:pPr lvl="0"/>
             <a:r>
-              <a:rPr lang="en-US" smtClean="0"/>
+              <a:rPr lang="en-US"/>
               <a:t>Click to edit Master text styles</a:t>
             </a:r>
           </a:p>
@@ -1719,38 +1721,37 @@
           <a:p>
             <a:pPr lvl="0"/>
             <a:r>
-              <a:rPr lang="en-US" smtClean="0"/>
+              <a:rPr lang="en-US"/>
               <a:t>Click to edit Master text styles</a:t>
             </a:r>
           </a:p>
           <a:p>
             <a:pPr lvl="1"/>
             <a:r>
-              <a:rPr lang="en-US" smtClean="0"/>
+              <a:rPr lang="en-US"/>
               <a:t>Second level</a:t>
             </a:r>
           </a:p>
           <a:p>
             <a:pPr lvl="2"/>
             <a:r>
-              <a:rPr lang="en-US" smtClean="0"/>
+              <a:rPr lang="en-US"/>
               <a:t>Third level</a:t>
             </a:r>
           </a:p>
           <a:p>
             <a:pPr lvl="3"/>
             <a:r>
-              <a:rPr lang="en-US" smtClean="0"/>
+              <a:rPr lang="en-US"/>
               <a:t>Fourth level</a:t>
             </a:r>
           </a:p>
           <a:p>
             <a:pPr lvl="4"/>
             <a:r>
-              <a:rPr lang="en-US" smtClean="0"/>
+              <a:rPr lang="en-US"/>
               <a:t>Fifth level</a:t>
             </a:r>
-            <a:endParaRPr lang="en-US"/>
           </a:p>
         </p:txBody>
       </p:sp>
@@ -1771,7 +1772,7 @@
           <a:p>
             <a:fld id="{5BCAD085-E8A6-8845-BD4E-CB4CCA059FC4}" type="datetimeFigureOut">
               <a:rPr lang="en-US" smtClean="0"/>
-              <a:t>1/27/13</a:t>
+              <a:t>5/23/26</a:t>
             </a:fld>
             <a:endParaRPr lang="en-US"/>
           </a:p>
@@ -1865,10 +1866,9 @@
           <a:lstStyle/>
           <a:p>
             <a:r>
-              <a:rPr lang="en-US" smtClean="0"/>
+              <a:rPr lang="en-US"/>
               <a:t>Click to edit Master title style</a:t>
             </a:r>
-            <a:endParaRPr lang="en-US"/>
           </a:p>
         </p:txBody>
       </p:sp>
@@ -1889,7 +1889,7 @@
           <a:p>
             <a:fld id="{5BCAD085-E8A6-8845-BD4E-CB4CCA059FC4}" type="datetimeFigureOut">
               <a:rPr lang="en-US" smtClean="0"/>
-              <a:t>1/27/13</a:t>
+              <a:t>5/23/26</a:t>
             </a:fld>
             <a:endParaRPr lang="en-US"/>
           </a:p>
@@ -1984,7 +1984,7 @@
           <a:p>
             <a:fld id="{5BCAD085-E8A6-8845-BD4E-CB4CCA059FC4}" type="datetimeFigureOut">
               <a:rPr lang="en-US" smtClean="0"/>
-              <a:t>1/27/13</a:t>
+              <a:t>5/23/26</a:t>
             </a:fld>
             <a:endParaRPr lang="en-US"/>
           </a:p>
@@ -2087,10 +2087,9 @@
           </a:lstStyle>
           <a:p>
             <a:r>
-              <a:rPr lang="en-US" smtClean="0"/>
+              <a:rPr lang="en-US"/>
               <a:t>Click to edit Master title style</a:t>
             </a:r>
-            <a:endParaRPr lang="en-US"/>
           </a:p>
         </p:txBody>
       </p:sp>
@@ -2144,38 +2143,37 @@
           <a:p>
             <a:pPr lvl="0"/>
             <a:r>
-              <a:rPr lang="en-US" smtClean="0"/>
+              <a:rPr lang="en-US"/>
               <a:t>Click to edit Master text styles</a:t>
             </a:r>
           </a:p>
           <a:p>
             <a:pPr lvl="1"/>
             <a:r>
-              <a:rPr lang="en-US" smtClean="0"/>
+              <a:rPr lang="en-US"/>
               <a:t>Second level</a:t>
             </a:r>
           </a:p>
           <a:p>
             <a:pPr lvl="2"/>
             <a:r>
-              <a:rPr lang="en-US" smtClean="0"/>
+              <a:rPr lang="en-US"/>
               <a:t>Third level</a:t>
             </a:r>
           </a:p>
           <a:p>
             <a:pPr lvl="3"/>
             <a:r>
-              <a:rPr lang="en-US" smtClean="0"/>
+              <a:rPr lang="en-US"/>
               <a:t>Fourth level</a:t>
             </a:r>
           </a:p>
           <a:p>
             <a:pPr lvl="4"/>
             <a:r>
-              <a:rPr lang="en-US" smtClean="0"/>
+              <a:rPr lang="en-US"/>
               <a:t>Fifth level</a:t>
             </a:r>
-            <a:endParaRPr lang="en-US"/>
           </a:p>
         </p:txBody>
       </p:sp>
@@ -2238,7 +2236,7 @@
           <a:p>
             <a:pPr lvl="0"/>
             <a:r>
-              <a:rPr lang="en-US" smtClean="0"/>
+              <a:rPr lang="en-US"/>
               <a:t>Click to edit Master text styles</a:t>
             </a:r>
           </a:p>
@@ -2261,7 +2259,7 @@
           <a:p>
             <a:fld id="{5BCAD085-E8A6-8845-BD4E-CB4CCA059FC4}" type="datetimeFigureOut">
               <a:rPr lang="en-US" smtClean="0"/>
-              <a:t>1/27/13</a:t>
+              <a:t>5/23/26</a:t>
             </a:fld>
             <a:endParaRPr lang="en-US"/>
           </a:p>
@@ -2364,10 +2362,9 @@
           </a:lstStyle>
           <a:p>
             <a:r>
-              <a:rPr lang="en-US" smtClean="0"/>
+              <a:rPr lang="en-US"/>
               <a:t>Click to edit Master title style</a:t>
             </a:r>
-            <a:endParaRPr lang="en-US"/>
           </a:p>
         </p:txBody>
       </p:sp>
@@ -2491,7 +2488,7 @@
           <a:p>
             <a:pPr lvl="0"/>
             <a:r>
-              <a:rPr lang="en-US" smtClean="0"/>
+              <a:rPr lang="en-US"/>
               <a:t>Click to edit Master text styles</a:t>
             </a:r>
           </a:p>
@@ -2514,7 +2511,7 @@
           <a:p>
             <a:fld id="{5BCAD085-E8A6-8845-BD4E-CB4CCA059FC4}" type="datetimeFigureOut">
               <a:rPr lang="en-US" smtClean="0"/>
-              <a:t>1/27/13</a:t>
+              <a:t>5/23/26</a:t>
             </a:fld>
             <a:endParaRPr lang="en-US"/>
           </a:p>
@@ -2623,10 +2620,9 @@
           <a:lstStyle/>
           <a:p>
             <a:r>
-              <a:rPr lang="en-US" smtClean="0"/>
+              <a:rPr lang="en-US"/>
               <a:t>Click to edit Master title style</a:t>
             </a:r>
-            <a:endParaRPr lang="en-US"/>
           </a:p>
         </p:txBody>
       </p:sp>
@@ -2657,38 +2653,37 @@
           <a:p>
             <a:pPr lvl="0"/>
             <a:r>
-              <a:rPr lang="en-US" smtClean="0"/>
+              <a:rPr lang="en-US"/>
               <a:t>Click to edit Master text styles</a:t>
             </a:r>
           </a:p>
           <a:p>
             <a:pPr lvl="1"/>
             <a:r>
-              <a:rPr lang="en-US" smtClean="0"/>
+              <a:rPr lang="en-US"/>
               <a:t>Second level</a:t>
             </a:r>
           </a:p>
           <a:p>
             <a:pPr lvl="2"/>
             <a:r>
-              <a:rPr lang="en-US" smtClean="0"/>
+              <a:rPr lang="en-US"/>
               <a:t>Third level</a:t>
             </a:r>
           </a:p>
           <a:p>
             <a:pPr lvl="3"/>
             <a:r>
-              <a:rPr lang="en-US" smtClean="0"/>
+              <a:rPr lang="en-US"/>
               <a:t>Fourth level</a:t>
             </a:r>
           </a:p>
           <a:p>
             <a:pPr lvl="4"/>
             <a:r>
-              <a:rPr lang="en-US" smtClean="0"/>
+              <a:rPr lang="en-US"/>
               <a:t>Fifth level</a:t>
             </a:r>
-            <a:endParaRPr lang="en-US"/>
           </a:p>
         </p:txBody>
       </p:sp>
@@ -2727,7 +2722,7 @@
           <a:p>
             <a:fld id="{5BCAD085-E8A6-8845-BD4E-CB4CCA059FC4}" type="datetimeFigureOut">
               <a:rPr lang="en-US" smtClean="0"/>
-              <a:t>1/27/13</a:t>
+              <a:t>5/23/26</a:t>
             </a:fld>
             <a:endParaRPr lang="en-US"/>
           </a:p>
@@ -3086,7 +3081,7 @@
 </file>
 
 <file path=ppt/slides/slide1.xml><?xml version="1.0" encoding="utf-8"?>
-<p:sld xmlns:a="http://schemas.openxmlformats.org/drawingml/2006/main" xmlns:p="http://schemas.openxmlformats.org/presentationml/2006/main" xmlns:r="http://schemas.openxmlformats.org/officeDocument/2006/relationships">
+<p:sld xmlns:a="http://schemas.openxmlformats.org/drawingml/2006/main" xmlns:r="http://schemas.openxmlformats.org/officeDocument/2006/relationships" xmlns:p="http://schemas.openxmlformats.org/presentationml/2006/main">
   <p:cSld>
     <p:spTree>
       <p:nvGrpSpPr>
@@ -3094,7 +3089,14 @@
         <p:cNvGrpSpPr/>
         <p:nvPr/>
       </p:nvGrpSpPr>
-      <p:grpSpPr/>
+      <p:grpSpPr>
+        <a:xfrm>
+          <a:off x="0" y="0"/>
+          <a:ext cx="0" cy="0"/>
+          <a:chOff x="0" y="0"/>
+          <a:chExt cx="0" cy="0"/>
+        </a:xfrm>
+      </p:grpSpPr>
       <p:sp>
         <p:nvSpPr>
           <p:cNvPr id="2" name="Rectangle 1"/>
@@ -3136,6 +3138,7 @@
           <a:lstStyle/>
           <a:p>
             <a:pPr algn="ctr"/>
+            <a:endParaRPr/>
           </a:p>
         </p:txBody>
       </p:sp>
@@ -3179,6 +3182,7 @@
           <a:lstStyle/>
           <a:p>
             <a:pPr algn="ctr"/>
+            <a:endParaRPr/>
           </a:p>
         </p:txBody>
       </p:sp>
@@ -3222,6 +3226,7 @@
           <a:lstStyle/>
           <a:p>
             <a:pPr algn="ctr"/>
+            <a:endParaRPr/>
           </a:p>
         </p:txBody>
       </p:sp>
@@ -3242,7 +3247,7 @@
           <a:noFill/>
         </p:spPr>
         <p:txBody>
-          <a:bodyPr wrap="square" lIns="0" rIns="0" tIns="0" bIns="0">
+          <a:bodyPr wrap="square" lIns="0" tIns="0" rIns="0" bIns="0">
             <a:spAutoFit/>
           </a:bodyPr>
           <a:lstStyle/>
@@ -3277,7 +3282,7 @@
           <a:noFill/>
         </p:spPr>
         <p:txBody>
-          <a:bodyPr wrap="square" lIns="0" rIns="0" tIns="0" bIns="0">
+          <a:bodyPr wrap="square" lIns="0" tIns="0" rIns="0" bIns="0">
             <a:spAutoFit/>
           </a:bodyPr>
           <a:lstStyle/>
@@ -3312,7 +3317,7 @@
           <a:noFill/>
         </p:spPr>
         <p:txBody>
-          <a:bodyPr wrap="square" lIns="0" rIns="0" tIns="0" bIns="0">
+          <a:bodyPr wrap="square" lIns="0" tIns="0" rIns="0" bIns="0">
             <a:spAutoFit/>
           </a:bodyPr>
           <a:lstStyle/>
@@ -3347,7 +3352,7 @@
           <a:noFill/>
         </p:spPr>
         <p:txBody>
-          <a:bodyPr wrap="square" lIns="0" rIns="0" tIns="0" bIns="0">
+          <a:bodyPr wrap="square" lIns="0" tIns="0" rIns="0" bIns="0">
             <a:spAutoFit/>
           </a:bodyPr>
           <a:lstStyle/>
@@ -3374,7 +3379,7 @@
 </file>
 
 <file path=ppt/slides/slide2.xml><?xml version="1.0" encoding="utf-8"?>
-<p:sld xmlns:a="http://schemas.openxmlformats.org/drawingml/2006/main" xmlns:p="http://schemas.openxmlformats.org/presentationml/2006/main" xmlns:r="http://schemas.openxmlformats.org/officeDocument/2006/relationships">
+<p:sld xmlns:a="http://schemas.openxmlformats.org/drawingml/2006/main" xmlns:r="http://schemas.openxmlformats.org/officeDocument/2006/relationships" xmlns:p="http://schemas.openxmlformats.org/presentationml/2006/main">
   <p:cSld>
     <p:spTree>
       <p:nvGrpSpPr>
@@ -3382,7 +3387,14 @@
         <p:cNvGrpSpPr/>
         <p:nvPr/>
       </p:nvGrpSpPr>
-      <p:grpSpPr/>
+      <p:grpSpPr>
+        <a:xfrm>
+          <a:off x="0" y="0"/>
+          <a:ext cx="0" cy="0"/>
+          <a:chOff x="0" y="0"/>
+          <a:chExt cx="0" cy="0"/>
+        </a:xfrm>
+      </p:grpSpPr>
       <p:sp>
         <p:nvSpPr>
           <p:cNvPr id="2" name="Rectangle 1"/>
@@ -3424,6 +3436,7 @@
           <a:lstStyle/>
           <a:p>
             <a:pPr algn="ctr"/>
+            <a:endParaRPr/>
           </a:p>
         </p:txBody>
       </p:sp>
@@ -3444,7 +3457,7 @@
           <a:noFill/>
         </p:spPr>
         <p:txBody>
-          <a:bodyPr wrap="square" lIns="0" rIns="0" tIns="0" bIns="0">
+          <a:bodyPr wrap="square" lIns="0" tIns="0" rIns="0" bIns="0">
             <a:spAutoFit/>
           </a:bodyPr>
           <a:lstStyle/>
@@ -3502,6 +3515,7 @@
           <a:lstStyle/>
           <a:p>
             <a:pPr algn="ctr"/>
+            <a:endParaRPr/>
           </a:p>
         </p:txBody>
       </p:sp>
@@ -3522,7 +3536,7 @@
           <a:noFill/>
         </p:spPr>
         <p:txBody>
-          <a:bodyPr wrap="square" lIns="0" rIns="0" tIns="0" bIns="0">
+          <a:bodyPr wrap="square" lIns="0" tIns="0" rIns="0" bIns="0">
             <a:spAutoFit/>
           </a:bodyPr>
           <a:lstStyle/>
@@ -3664,7 +3678,7 @@
           <a:noFill/>
         </p:spPr>
         <p:txBody>
-          <a:bodyPr wrap="square" lIns="0" rIns="0" tIns="0" bIns="0">
+          <a:bodyPr wrap="square" lIns="0" tIns="0" rIns="0" bIns="0">
             <a:spAutoFit/>
           </a:bodyPr>
           <a:lstStyle/>
@@ -3699,7 +3713,7 @@
           <a:noFill/>
         </p:spPr>
         <p:txBody>
-          <a:bodyPr wrap="square" lIns="0" rIns="0" tIns="0" bIns="0">
+          <a:bodyPr wrap="square" lIns="0" tIns="0" rIns="0" bIns="0">
             <a:spAutoFit/>
           </a:bodyPr>
           <a:lstStyle/>
@@ -3726,7 +3740,7 @@
 </file>
 
 <file path=ppt/slides/slide3.xml><?xml version="1.0" encoding="utf-8"?>
-<p:sld xmlns:a="http://schemas.openxmlformats.org/drawingml/2006/main" xmlns:p="http://schemas.openxmlformats.org/presentationml/2006/main" xmlns:r="http://schemas.openxmlformats.org/officeDocument/2006/relationships">
+<p:sld xmlns:a="http://schemas.openxmlformats.org/drawingml/2006/main" xmlns:r="http://schemas.openxmlformats.org/officeDocument/2006/relationships" xmlns:p="http://schemas.openxmlformats.org/presentationml/2006/main">
   <p:cSld>
     <p:spTree>
       <p:nvGrpSpPr>
@@ -3734,7 +3748,14 @@
         <p:cNvGrpSpPr/>
         <p:nvPr/>
       </p:nvGrpSpPr>
-      <p:grpSpPr/>
+      <p:grpSpPr>
+        <a:xfrm>
+          <a:off x="0" y="0"/>
+          <a:ext cx="0" cy="0"/>
+          <a:chOff x="0" y="0"/>
+          <a:chExt cx="0" cy="0"/>
+        </a:xfrm>
+      </p:grpSpPr>
       <p:sp>
         <p:nvSpPr>
           <p:cNvPr id="2" name="Rectangle 1"/>
@@ -3776,6 +3797,7 @@
           <a:lstStyle/>
           <a:p>
             <a:pPr algn="ctr"/>
+            <a:endParaRPr/>
           </a:p>
         </p:txBody>
       </p:sp>
@@ -3796,7 +3818,7 @@
           <a:noFill/>
         </p:spPr>
         <p:txBody>
-          <a:bodyPr wrap="square" lIns="0" rIns="0" tIns="0" bIns="0">
+          <a:bodyPr wrap="square" lIns="0" tIns="0" rIns="0" bIns="0">
             <a:spAutoFit/>
           </a:bodyPr>
           <a:lstStyle/>
@@ -3854,6 +3876,7 @@
           <a:lstStyle/>
           <a:p>
             <a:pPr algn="ctr"/>
+            <a:endParaRPr/>
           </a:p>
         </p:txBody>
       </p:sp>
@@ -3874,7 +3897,7 @@
           <a:noFill/>
         </p:spPr>
         <p:txBody>
-          <a:bodyPr wrap="square" lIns="0" rIns="0" tIns="0" bIns="0">
+          <a:bodyPr wrap="square" lIns="0" tIns="0" rIns="0" bIns="0">
             <a:spAutoFit/>
           </a:bodyPr>
           <a:lstStyle/>
@@ -3936,6 +3959,7 @@
           <a:lstStyle/>
           <a:p>
             <a:pPr algn="ctr"/>
+            <a:endParaRPr/>
           </a:p>
         </p:txBody>
       </p:sp>
@@ -3979,6 +4003,7 @@
           <a:lstStyle/>
           <a:p>
             <a:pPr algn="ctr"/>
+            <a:endParaRPr/>
           </a:p>
         </p:txBody>
       </p:sp>
@@ -3999,7 +4024,7 @@
           <a:noFill/>
         </p:spPr>
         <p:txBody>
-          <a:bodyPr wrap="square" lIns="0" rIns="0" tIns="0" bIns="0">
+          <a:bodyPr wrap="square" lIns="0" tIns="0" rIns="0" bIns="0">
             <a:spAutoFit/>
           </a:bodyPr>
           <a:lstStyle/>
@@ -4034,7 +4059,7 @@
           <a:noFill/>
         </p:spPr>
         <p:txBody>
-          <a:bodyPr wrap="square" lIns="0" rIns="0" tIns="0" bIns="0">
+          <a:bodyPr wrap="square" lIns="0" tIns="0" rIns="0" bIns="0">
             <a:spAutoFit/>
           </a:bodyPr>
           <a:lstStyle/>
@@ -4096,6 +4121,7 @@
           <a:lstStyle/>
           <a:p>
             <a:pPr algn="ctr"/>
+            <a:endParaRPr/>
           </a:p>
         </p:txBody>
       </p:sp>
@@ -4139,6 +4165,7 @@
           <a:lstStyle/>
           <a:p>
             <a:pPr algn="ctr"/>
+            <a:endParaRPr/>
           </a:p>
         </p:txBody>
       </p:sp>
@@ -4159,7 +4186,7 @@
           <a:noFill/>
         </p:spPr>
         <p:txBody>
-          <a:bodyPr wrap="square" lIns="0" rIns="0" tIns="0" bIns="0">
+          <a:bodyPr wrap="square" lIns="0" tIns="0" rIns="0" bIns="0">
             <a:spAutoFit/>
           </a:bodyPr>
           <a:lstStyle/>
@@ -4194,7 +4221,7 @@
           <a:noFill/>
         </p:spPr>
         <p:txBody>
-          <a:bodyPr wrap="square" lIns="0" rIns="0" tIns="0" bIns="0">
+          <a:bodyPr wrap="square" lIns="0" tIns="0" rIns="0" bIns="0">
             <a:spAutoFit/>
           </a:bodyPr>
           <a:lstStyle/>
@@ -4229,7 +4256,7 @@
           <a:noFill/>
         </p:spPr>
         <p:txBody>
-          <a:bodyPr wrap="square" lIns="0" rIns="0" tIns="0" bIns="0">
+          <a:bodyPr wrap="square" lIns="0" tIns="0" rIns="0" bIns="0">
             <a:spAutoFit/>
           </a:bodyPr>
           <a:lstStyle/>
@@ -4264,7 +4291,7 @@
           <a:noFill/>
         </p:spPr>
         <p:txBody>
-          <a:bodyPr wrap="square" lIns="0" rIns="0" tIns="0" bIns="0">
+          <a:bodyPr wrap="square" lIns="0" tIns="0" rIns="0" bIns="0">
             <a:spAutoFit/>
           </a:bodyPr>
           <a:lstStyle/>
@@ -4299,7 +4326,7 @@
           <a:noFill/>
         </p:spPr>
         <p:txBody>
-          <a:bodyPr wrap="square" lIns="0" rIns="0" tIns="0" bIns="0">
+          <a:bodyPr wrap="square" lIns="0" tIns="0" rIns="0" bIns="0">
             <a:spAutoFit/>
           </a:bodyPr>
           <a:lstStyle/>
@@ -4326,7 +4353,7 @@
 </file>
 
 <file path=ppt/slides/slide4.xml><?xml version="1.0" encoding="utf-8"?>
-<p:sld xmlns:a="http://schemas.openxmlformats.org/drawingml/2006/main" xmlns:p="http://schemas.openxmlformats.org/presentationml/2006/main" xmlns:r="http://schemas.openxmlformats.org/officeDocument/2006/relationships">
+<p:sld xmlns:a="http://schemas.openxmlformats.org/drawingml/2006/main" xmlns:r="http://schemas.openxmlformats.org/officeDocument/2006/relationships" xmlns:p="http://schemas.openxmlformats.org/presentationml/2006/main">
   <p:cSld>
     <p:spTree>
       <p:nvGrpSpPr>
@@ -4334,7 +4361,14 @@
         <p:cNvGrpSpPr/>
         <p:nvPr/>
       </p:nvGrpSpPr>
-      <p:grpSpPr/>
+      <p:grpSpPr>
+        <a:xfrm>
+          <a:off x="0" y="0"/>
+          <a:ext cx="0" cy="0"/>
+          <a:chOff x="0" y="0"/>
+          <a:chExt cx="0" cy="0"/>
+        </a:xfrm>
+      </p:grpSpPr>
       <p:sp>
         <p:nvSpPr>
           <p:cNvPr id="2" name="Rectangle 1"/>
@@ -4343,7 +4377,7 @@
         </p:nvSpPr>
         <p:spPr>
           <a:xfrm>
-            <a:off x="0" y="0"/>
+            <a:off x="0" y="274320"/>
             <a:ext cx="12191695" cy="6858000"/>
           </a:xfrm>
           <a:prstGeom prst="rect">
@@ -4376,6 +4410,7 @@
           <a:lstStyle/>
           <a:p>
             <a:pPr algn="ctr"/>
+            <a:endParaRPr/>
           </a:p>
         </p:txBody>
       </p:sp>
@@ -4396,7 +4431,7 @@
           <a:noFill/>
         </p:spPr>
         <p:txBody>
-          <a:bodyPr wrap="square" lIns="0" rIns="0" tIns="0" bIns="0">
+          <a:bodyPr wrap="square" lIns="0" tIns="0" rIns="0" bIns="0">
             <a:spAutoFit/>
           </a:bodyPr>
           <a:lstStyle/>
@@ -4454,6 +4489,7 @@
           <a:lstStyle/>
           <a:p>
             <a:pPr algn="ctr"/>
+            <a:endParaRPr/>
           </a:p>
         </p:txBody>
       </p:sp>
@@ -4474,7 +4510,7 @@
           <a:noFill/>
         </p:spPr>
         <p:txBody>
-          <a:bodyPr wrap="square" lIns="0" rIns="0" tIns="0" bIns="0">
+          <a:bodyPr wrap="square" lIns="0" tIns="0" rIns="0" bIns="0">
             <a:spAutoFit/>
           </a:bodyPr>
           <a:lstStyle/>
@@ -4532,6 +4568,7 @@
           <a:lstStyle/>
           <a:p>
             <a:pPr algn="ctr"/>
+            <a:endParaRPr/>
           </a:p>
         </p:txBody>
       </p:sp>
@@ -4552,7 +4589,7 @@
           <a:noFill/>
         </p:spPr>
         <p:txBody>
-          <a:bodyPr wrap="square" lIns="0" rIns="0" tIns="0" bIns="0">
+          <a:bodyPr wrap="square" lIns="0" tIns="0" rIns="0" bIns="0">
             <a:spAutoFit/>
           </a:bodyPr>
           <a:lstStyle/>
@@ -4587,7 +4624,7 @@
           <a:noFill/>
         </p:spPr>
         <p:txBody>
-          <a:bodyPr wrap="square" lIns="0" rIns="0" tIns="0" bIns="0">
+          <a:bodyPr wrap="square" lIns="0" tIns="0" rIns="0" bIns="0">
             <a:spAutoFit/>
           </a:bodyPr>
           <a:lstStyle/>
@@ -4614,7 +4651,7 @@
         <p:spPr>
           <a:xfrm>
             <a:off x="548640" y="3703320"/>
-            <a:ext cx="2743200" cy="2286000"/>
+            <a:ext cx="2743200" cy="400110"/>
           </a:xfrm>
           <a:prstGeom prst="rect">
             <a:avLst/>
@@ -4622,20 +4659,38 @@
           <a:noFill/>
         </p:spPr>
         <p:txBody>
-          <a:bodyPr wrap="square" lIns="0" rIns="0" tIns="0" bIns="0">
+          <a:bodyPr wrap="square" lIns="0" tIns="0" rIns="0" bIns="0">
             <a:spAutoFit/>
           </a:bodyPr>
           <a:lstStyle/>
           <a:p>
             <a:pPr algn="l"/>
             <a:r>
-              <a:rPr sz="1300" b="0">
+              <a:rPr sz="1300" b="0" dirty="0">
                 <a:solidFill>
                   <a:srgbClr val="141B29"/>
                 </a:solidFill>
                 <a:latin typeface="Calibri"/>
               </a:rPr>
-              <a:t>Up to 20,000 balanced personas sampled at startup.</a:t>
+              <a:t>Up to </a:t>
+            </a:r>
+            <a:r>
+              <a:rPr lang="en-US" sz="1300" dirty="0">
+                <a:solidFill>
+                  <a:srgbClr val="141B29"/>
+                </a:solidFill>
+                <a:latin typeface="Calibri"/>
+              </a:rPr>
+              <a:t>13,354</a:t>
+            </a:r>
+            <a:r>
+              <a:rPr sz="1300" b="0" dirty="0">
+                <a:solidFill>
+                  <a:srgbClr val="141B29"/>
+                </a:solidFill>
+                <a:latin typeface="Calibri"/>
+              </a:rPr>
+              <a:t> balanced personas sampled at startup.</a:t>
             </a:r>
           </a:p>
         </p:txBody>
@@ -4680,6 +4735,7 @@
           <a:lstStyle/>
           <a:p>
             <a:pPr algn="ctr"/>
+            <a:endParaRPr/>
           </a:p>
         </p:txBody>
       </p:sp>
@@ -4700,7 +4756,7 @@
           <a:noFill/>
         </p:spPr>
         <p:txBody>
-          <a:bodyPr wrap="square" lIns="0" rIns="0" tIns="0" bIns="0">
+          <a:bodyPr wrap="square" lIns="0" tIns="0" rIns="0" bIns="0">
             <a:spAutoFit/>
           </a:bodyPr>
           <a:lstStyle/>
@@ -4735,7 +4791,7 @@
           <a:noFill/>
         </p:spPr>
         <p:txBody>
-          <a:bodyPr wrap="square" lIns="0" rIns="0" tIns="0" bIns="0">
+          <a:bodyPr wrap="square" lIns="0" tIns="0" rIns="0" bIns="0">
             <a:spAutoFit/>
           </a:bodyPr>
           <a:lstStyle/>
@@ -4770,7 +4826,7 @@
           <a:noFill/>
         </p:spPr>
         <p:txBody>
-          <a:bodyPr wrap="square" lIns="0" rIns="0" tIns="0" bIns="0">
+          <a:bodyPr wrap="square" lIns="0" tIns="0" rIns="0" bIns="0">
             <a:spAutoFit/>
           </a:bodyPr>
           <a:lstStyle/>
@@ -4828,6 +4884,7 @@
           <a:lstStyle/>
           <a:p>
             <a:pPr algn="ctr"/>
+            <a:endParaRPr/>
           </a:p>
         </p:txBody>
       </p:sp>
@@ -4848,7 +4905,7 @@
           <a:noFill/>
         </p:spPr>
         <p:txBody>
-          <a:bodyPr wrap="square" lIns="0" rIns="0" tIns="0" bIns="0">
+          <a:bodyPr wrap="square" lIns="0" tIns="0" rIns="0" bIns="0">
             <a:spAutoFit/>
           </a:bodyPr>
           <a:lstStyle/>
@@ -4883,7 +4940,7 @@
           <a:noFill/>
         </p:spPr>
         <p:txBody>
-          <a:bodyPr wrap="square" lIns="0" rIns="0" tIns="0" bIns="0">
+          <a:bodyPr wrap="square" lIns="0" tIns="0" rIns="0" bIns="0">
             <a:spAutoFit/>
           </a:bodyPr>
           <a:lstStyle/>
@@ -4918,7 +4975,7 @@
           <a:noFill/>
         </p:spPr>
         <p:txBody>
-          <a:bodyPr wrap="square" lIns="0" rIns="0" tIns="0" bIns="0">
+          <a:bodyPr wrap="square" lIns="0" tIns="0" rIns="0" bIns="0">
             <a:spAutoFit/>
           </a:bodyPr>
           <a:lstStyle/>
@@ -4976,6 +5033,7 @@
           <a:lstStyle/>
           <a:p>
             <a:pPr algn="ctr"/>
+            <a:endParaRPr/>
           </a:p>
         </p:txBody>
       </p:sp>
@@ -4996,7 +5054,7 @@
           <a:noFill/>
         </p:spPr>
         <p:txBody>
-          <a:bodyPr wrap="square" lIns="0" rIns="0" tIns="0" bIns="0">
+          <a:bodyPr wrap="square" lIns="0" tIns="0" rIns="0" bIns="0">
             <a:spAutoFit/>
           </a:bodyPr>
           <a:lstStyle/>
@@ -5031,7 +5089,7 @@
           <a:noFill/>
         </p:spPr>
         <p:txBody>
-          <a:bodyPr wrap="square" lIns="0" rIns="0" tIns="0" bIns="0">
+          <a:bodyPr wrap="square" lIns="0" tIns="0" rIns="0" bIns="0">
             <a:spAutoFit/>
           </a:bodyPr>
           <a:lstStyle/>
@@ -5066,7 +5124,7 @@
           <a:noFill/>
         </p:spPr>
         <p:txBody>
-          <a:bodyPr wrap="square" lIns="0" rIns="0" tIns="0" bIns="0">
+          <a:bodyPr wrap="square" lIns="0" tIns="0" rIns="0" bIns="0">
             <a:spAutoFit/>
           </a:bodyPr>
           <a:lstStyle/>
@@ -5101,7 +5159,7 @@
           <a:noFill/>
         </p:spPr>
         <p:txBody>
-          <a:bodyPr wrap="square" lIns="0" rIns="0" tIns="0" bIns="0">
+          <a:bodyPr wrap="square" lIns="0" tIns="0" rIns="0" bIns="0">
             <a:spAutoFit/>
           </a:bodyPr>
           <a:lstStyle/>
@@ -5136,7 +5194,7 @@
           <a:noFill/>
         </p:spPr>
         <p:txBody>
-          <a:bodyPr wrap="square" lIns="0" rIns="0" tIns="0" bIns="0">
+          <a:bodyPr wrap="square" lIns="0" tIns="0" rIns="0" bIns="0">
             <a:spAutoFit/>
           </a:bodyPr>
           <a:lstStyle/>
@@ -5171,7 +5229,7 @@
           <a:noFill/>
         </p:spPr>
         <p:txBody>
-          <a:bodyPr wrap="square" lIns="0" rIns="0" tIns="0" bIns="0">
+          <a:bodyPr wrap="square" lIns="0" tIns="0" rIns="0" bIns="0">
             <a:spAutoFit/>
           </a:bodyPr>
           <a:lstStyle/>
@@ -5198,7 +5256,7 @@
 </file>
 
 <file path=ppt/slides/slide5.xml><?xml version="1.0" encoding="utf-8"?>
-<p:sld xmlns:a="http://schemas.openxmlformats.org/drawingml/2006/main" xmlns:p="http://schemas.openxmlformats.org/presentationml/2006/main" xmlns:r="http://schemas.openxmlformats.org/officeDocument/2006/relationships">
+<p:sld xmlns:a="http://schemas.openxmlformats.org/drawingml/2006/main" xmlns:r="http://schemas.openxmlformats.org/officeDocument/2006/relationships" xmlns:p="http://schemas.openxmlformats.org/presentationml/2006/main">
   <p:cSld>
     <p:spTree>
       <p:nvGrpSpPr>
@@ -5206,7 +5264,14 @@
         <p:cNvGrpSpPr/>
         <p:nvPr/>
       </p:nvGrpSpPr>
-      <p:grpSpPr/>
+      <p:grpSpPr>
+        <a:xfrm>
+          <a:off x="0" y="0"/>
+          <a:ext cx="0" cy="0"/>
+          <a:chOff x="0" y="0"/>
+          <a:chExt cx="0" cy="0"/>
+        </a:xfrm>
+      </p:grpSpPr>
       <p:sp>
         <p:nvSpPr>
           <p:cNvPr id="2" name="Rectangle 1"/>
@@ -5248,6 +5313,7 @@
           <a:lstStyle/>
           <a:p>
             <a:pPr algn="ctr"/>
+            <a:endParaRPr/>
           </a:p>
         </p:txBody>
       </p:sp>
@@ -5268,7 +5334,7 @@
           <a:noFill/>
         </p:spPr>
         <p:txBody>
-          <a:bodyPr wrap="square" lIns="0" rIns="0" tIns="0" bIns="0">
+          <a:bodyPr wrap="square" lIns="0" tIns="0" rIns="0" bIns="0">
             <a:spAutoFit/>
           </a:bodyPr>
           <a:lstStyle/>
@@ -5326,6 +5392,7 @@
           <a:lstStyle/>
           <a:p>
             <a:pPr algn="ctr"/>
+            <a:endParaRPr/>
           </a:p>
         </p:txBody>
       </p:sp>
@@ -5346,7 +5413,7 @@
           <a:noFill/>
         </p:spPr>
         <p:txBody>
-          <a:bodyPr wrap="square" lIns="0" rIns="0" tIns="0" bIns="0">
+          <a:bodyPr wrap="square" lIns="0" tIns="0" rIns="0" bIns="0">
             <a:spAutoFit/>
           </a:bodyPr>
           <a:lstStyle/>
@@ -5404,6 +5471,7 @@
           <a:lstStyle/>
           <a:p>
             <a:pPr algn="ctr"/>
+            <a:endParaRPr/>
           </a:p>
         </p:txBody>
       </p:sp>
@@ -5424,7 +5492,7 @@
           <a:noFill/>
         </p:spPr>
         <p:txBody>
-          <a:bodyPr wrap="square" lIns="0" rIns="0" tIns="0" bIns="0">
+          <a:bodyPr wrap="square" lIns="0" tIns="0" rIns="0" bIns="0">
             <a:spAutoFit/>
           </a:bodyPr>
           <a:lstStyle/>
@@ -5459,7 +5527,7 @@
           <a:noFill/>
         </p:spPr>
         <p:txBody>
-          <a:bodyPr wrap="square" lIns="0" rIns="0" tIns="0" bIns="0">
+          <a:bodyPr wrap="square" lIns="0" tIns="0" rIns="0" bIns="0">
             <a:spAutoFit/>
           </a:bodyPr>
           <a:lstStyle/>
@@ -5517,6 +5585,7 @@
           <a:lstStyle/>
           <a:p>
             <a:pPr algn="ctr"/>
+            <a:endParaRPr/>
           </a:p>
         </p:txBody>
       </p:sp>
@@ -5537,7 +5606,7 @@
           <a:noFill/>
         </p:spPr>
         <p:txBody>
-          <a:bodyPr wrap="square" lIns="0" rIns="0" tIns="0" bIns="0">
+          <a:bodyPr wrap="square" lIns="0" tIns="0" rIns="0" bIns="0">
             <a:spAutoFit/>
           </a:bodyPr>
           <a:lstStyle/>
@@ -5572,7 +5641,7 @@
           <a:noFill/>
         </p:spPr>
         <p:txBody>
-          <a:bodyPr wrap="square" lIns="0" rIns="0" tIns="0" bIns="0">
+          <a:bodyPr wrap="square" lIns="0" tIns="0" rIns="0" bIns="0">
             <a:spAutoFit/>
           </a:bodyPr>
           <a:lstStyle/>
@@ -5630,6 +5699,7 @@
           <a:lstStyle/>
           <a:p>
             <a:pPr algn="ctr"/>
+            <a:endParaRPr/>
           </a:p>
         </p:txBody>
       </p:sp>
@@ -5650,7 +5720,7 @@
           <a:noFill/>
         </p:spPr>
         <p:txBody>
-          <a:bodyPr wrap="square" lIns="0" rIns="0" tIns="0" bIns="0">
+          <a:bodyPr wrap="square" lIns="0" tIns="0" rIns="0" bIns="0">
             <a:spAutoFit/>
           </a:bodyPr>
           <a:lstStyle/>
@@ -5685,7 +5755,7 @@
           <a:noFill/>
         </p:spPr>
         <p:txBody>
-          <a:bodyPr wrap="square" lIns="0" rIns="0" tIns="0" bIns="0">
+          <a:bodyPr wrap="square" lIns="0" tIns="0" rIns="0" bIns="0">
             <a:spAutoFit/>
           </a:bodyPr>
           <a:lstStyle/>
@@ -5743,6 +5813,7 @@
           <a:lstStyle/>
           <a:p>
             <a:pPr algn="ctr"/>
+            <a:endParaRPr/>
           </a:p>
         </p:txBody>
       </p:sp>
@@ -5763,7 +5834,7 @@
           <a:noFill/>
         </p:spPr>
         <p:txBody>
-          <a:bodyPr wrap="square" lIns="0" rIns="0" tIns="0" bIns="0">
+          <a:bodyPr wrap="square" lIns="0" tIns="0" rIns="0" bIns="0">
             <a:spAutoFit/>
           </a:bodyPr>
           <a:lstStyle/>
@@ -5798,7 +5869,7 @@
           <a:noFill/>
         </p:spPr>
         <p:txBody>
-          <a:bodyPr wrap="square" lIns="0" rIns="0" tIns="0" bIns="0">
+          <a:bodyPr wrap="square" lIns="0" tIns="0" rIns="0" bIns="0">
             <a:spAutoFit/>
           </a:bodyPr>
           <a:lstStyle/>
@@ -5856,6 +5927,7 @@
           <a:lstStyle/>
           <a:p>
             <a:pPr algn="ctr"/>
+            <a:endParaRPr/>
           </a:p>
         </p:txBody>
       </p:sp>
@@ -5876,7 +5948,7 @@
           <a:noFill/>
         </p:spPr>
         <p:txBody>
-          <a:bodyPr wrap="square" lIns="0" rIns="0" tIns="0" bIns="0">
+          <a:bodyPr wrap="square" lIns="0" tIns="0" rIns="0" bIns="0">
             <a:spAutoFit/>
           </a:bodyPr>
           <a:lstStyle/>
@@ -5911,7 +5983,7 @@
           <a:noFill/>
         </p:spPr>
         <p:txBody>
-          <a:bodyPr wrap="square" lIns="0" rIns="0" tIns="0" bIns="0">
+          <a:bodyPr wrap="square" lIns="0" tIns="0" rIns="0" bIns="0">
             <a:spAutoFit/>
           </a:bodyPr>
           <a:lstStyle/>
@@ -5946,7 +6018,7 @@
           <a:noFill/>
         </p:spPr>
         <p:txBody>
-          <a:bodyPr wrap="square" lIns="0" rIns="0" tIns="0" bIns="0">
+          <a:bodyPr wrap="square" lIns="0" tIns="0" rIns="0" bIns="0">
             <a:spAutoFit/>
           </a:bodyPr>
           <a:lstStyle/>
@@ -5981,7 +6053,7 @@
           <a:noFill/>
         </p:spPr>
         <p:txBody>
-          <a:bodyPr wrap="square" lIns="0" rIns="0" tIns="0" bIns="0">
+          <a:bodyPr wrap="square" lIns="0" tIns="0" rIns="0" bIns="0">
             <a:spAutoFit/>
           </a:bodyPr>
           <a:lstStyle/>
@@ -6008,7 +6080,7 @@
 </file>
 
 <file path=ppt/slides/slide6.xml><?xml version="1.0" encoding="utf-8"?>
-<p:sld xmlns:a="http://schemas.openxmlformats.org/drawingml/2006/main" xmlns:p="http://schemas.openxmlformats.org/presentationml/2006/main" xmlns:r="http://schemas.openxmlformats.org/officeDocument/2006/relationships">
+<p:sld xmlns:a="http://schemas.openxmlformats.org/drawingml/2006/main" xmlns:r="http://schemas.openxmlformats.org/officeDocument/2006/relationships" xmlns:p="http://schemas.openxmlformats.org/presentationml/2006/main">
   <p:cSld>
     <p:spTree>
       <p:nvGrpSpPr>
@@ -6016,7 +6088,14 @@
         <p:cNvGrpSpPr/>
         <p:nvPr/>
       </p:nvGrpSpPr>
-      <p:grpSpPr/>
+      <p:grpSpPr>
+        <a:xfrm>
+          <a:off x="0" y="0"/>
+          <a:ext cx="0" cy="0"/>
+          <a:chOff x="0" y="0"/>
+          <a:chExt cx="0" cy="0"/>
+        </a:xfrm>
+      </p:grpSpPr>
       <p:sp>
         <p:nvSpPr>
           <p:cNvPr id="2" name="Rectangle 1"/>
@@ -6058,6 +6137,7 @@
           <a:lstStyle/>
           <a:p>
             <a:pPr algn="ctr"/>
+            <a:endParaRPr/>
           </a:p>
         </p:txBody>
       </p:sp>
@@ -6078,7 +6158,7 @@
           <a:noFill/>
         </p:spPr>
         <p:txBody>
-          <a:bodyPr wrap="square" lIns="0" rIns="0" tIns="0" bIns="0">
+          <a:bodyPr wrap="square" lIns="0" tIns="0" rIns="0" bIns="0">
             <a:spAutoFit/>
           </a:bodyPr>
           <a:lstStyle/>
@@ -6136,6 +6216,7 @@
           <a:lstStyle/>
           <a:p>
             <a:pPr algn="ctr"/>
+            <a:endParaRPr/>
           </a:p>
         </p:txBody>
       </p:sp>
@@ -6156,7 +6237,7 @@
           <a:noFill/>
         </p:spPr>
         <p:txBody>
-          <a:bodyPr wrap="square" lIns="0" rIns="0" tIns="0" bIns="0">
+          <a:bodyPr wrap="square" lIns="0" tIns="0" rIns="0" bIns="0">
             <a:spAutoFit/>
           </a:bodyPr>
           <a:lstStyle/>
@@ -6191,7 +6272,7 @@
           <a:noFill/>
         </p:spPr>
         <p:txBody>
-          <a:bodyPr wrap="square" lIns="0" rIns="0" tIns="0" bIns="0">
+          <a:bodyPr wrap="square" lIns="0" tIns="0" rIns="0" bIns="0">
             <a:spAutoFit/>
           </a:bodyPr>
           <a:lstStyle/>
@@ -6251,6 +6332,7 @@
           <a:lstStyle/>
           <a:p>
             <a:pPr algn="ctr"/>
+            <a:endParaRPr/>
           </a:p>
         </p:txBody>
       </p:sp>
@@ -6271,7 +6353,7 @@
           <a:noFill/>
         </p:spPr>
         <p:txBody>
-          <a:bodyPr wrap="square" lIns="0" rIns="0" tIns="0" bIns="0">
+          <a:bodyPr wrap="square" lIns="0" tIns="0" rIns="0" bIns="0">
             <a:spAutoFit/>
           </a:bodyPr>
           <a:lstStyle/>
@@ -6306,7 +6388,7 @@
           <a:noFill/>
         </p:spPr>
         <p:txBody>
-          <a:bodyPr wrap="square" lIns="0" rIns="0" tIns="0" bIns="0">
+          <a:bodyPr wrap="square" lIns="0" tIns="0" rIns="0" bIns="0">
             <a:spAutoFit/>
           </a:bodyPr>
           <a:lstStyle/>
@@ -6366,6 +6448,7 @@
           <a:lstStyle/>
           <a:p>
             <a:pPr algn="ctr"/>
+            <a:endParaRPr/>
           </a:p>
         </p:txBody>
       </p:sp>
@@ -6386,7 +6469,7 @@
           <a:noFill/>
         </p:spPr>
         <p:txBody>
-          <a:bodyPr wrap="square" lIns="0" rIns="0" tIns="0" bIns="0">
+          <a:bodyPr wrap="square" lIns="0" tIns="0" rIns="0" bIns="0">
             <a:spAutoFit/>
           </a:bodyPr>
           <a:lstStyle/>
@@ -6421,7 +6504,7 @@
           <a:noFill/>
         </p:spPr>
         <p:txBody>
-          <a:bodyPr wrap="square" lIns="0" rIns="0" tIns="0" bIns="0">
+          <a:bodyPr wrap="square" lIns="0" tIns="0" rIns="0" bIns="0">
             <a:spAutoFit/>
           </a:bodyPr>
           <a:lstStyle/>
@@ -6481,6 +6564,7 @@
           <a:lstStyle/>
           <a:p>
             <a:pPr algn="ctr"/>
+            <a:endParaRPr/>
           </a:p>
         </p:txBody>
       </p:sp>
@@ -6501,7 +6585,7 @@
           <a:noFill/>
         </p:spPr>
         <p:txBody>
-          <a:bodyPr wrap="square" lIns="0" rIns="0" tIns="0" bIns="0">
+          <a:bodyPr wrap="square" lIns="0" tIns="0" rIns="0" bIns="0">
             <a:spAutoFit/>
           </a:bodyPr>
           <a:lstStyle/>
@@ -6536,7 +6620,7 @@
           <a:noFill/>
         </p:spPr>
         <p:txBody>
-          <a:bodyPr wrap="square" lIns="0" rIns="0" tIns="0" bIns="0">
+          <a:bodyPr wrap="square" lIns="0" tIns="0" rIns="0" bIns="0">
             <a:spAutoFit/>
           </a:bodyPr>
           <a:lstStyle/>
@@ -6596,6 +6680,7 @@
           <a:lstStyle/>
           <a:p>
             <a:pPr algn="ctr"/>
+            <a:endParaRPr/>
           </a:p>
         </p:txBody>
       </p:sp>
@@ -6616,7 +6701,7 @@
           <a:noFill/>
         </p:spPr>
         <p:txBody>
-          <a:bodyPr wrap="square" lIns="0" rIns="0" tIns="0" bIns="0">
+          <a:bodyPr wrap="square" lIns="0" tIns="0" rIns="0" bIns="0">
             <a:spAutoFit/>
           </a:bodyPr>
           <a:lstStyle/>
@@ -6651,7 +6736,7 @@
           <a:noFill/>
         </p:spPr>
         <p:txBody>
-          <a:bodyPr wrap="square" lIns="0" rIns="0" tIns="0" bIns="0">
+          <a:bodyPr wrap="square" lIns="0" tIns="0" rIns="0" bIns="0">
             <a:spAutoFit/>
           </a:bodyPr>
           <a:lstStyle/>
@@ -6686,7 +6771,7 @@
           <a:noFill/>
         </p:spPr>
         <p:txBody>
-          <a:bodyPr wrap="square" lIns="0" rIns="0" tIns="0" bIns="0">
+          <a:bodyPr wrap="square" lIns="0" tIns="0" rIns="0" bIns="0">
             <a:spAutoFit/>
           </a:bodyPr>
           <a:lstStyle/>
@@ -6828,7 +6913,7 @@
           <a:noFill/>
         </p:spPr>
         <p:txBody>
-          <a:bodyPr wrap="square" lIns="0" rIns="0" tIns="0" bIns="0">
+          <a:bodyPr wrap="square" lIns="0" tIns="0" rIns="0" bIns="0">
             <a:spAutoFit/>
           </a:bodyPr>
           <a:lstStyle/>
@@ -6863,7 +6948,7 @@
           <a:noFill/>
         </p:spPr>
         <p:txBody>
-          <a:bodyPr wrap="square" lIns="0" rIns="0" tIns="0" bIns="0">
+          <a:bodyPr wrap="square" lIns="0" tIns="0" rIns="0" bIns="0">
             <a:spAutoFit/>
           </a:bodyPr>
           <a:lstStyle/>
@@ -6890,7 +6975,7 @@
 </file>
 
 <file path=ppt/slides/slide7.xml><?xml version="1.0" encoding="utf-8"?>
-<p:sld xmlns:a="http://schemas.openxmlformats.org/drawingml/2006/main" xmlns:p="http://schemas.openxmlformats.org/presentationml/2006/main" xmlns:r="http://schemas.openxmlformats.org/officeDocument/2006/relationships">
+<p:sld xmlns:a="http://schemas.openxmlformats.org/drawingml/2006/main" xmlns:r="http://schemas.openxmlformats.org/officeDocument/2006/relationships" xmlns:p="http://schemas.openxmlformats.org/presentationml/2006/main">
   <p:cSld>
     <p:spTree>
       <p:nvGrpSpPr>
@@ -6898,7 +6983,14 @@
         <p:cNvGrpSpPr/>
         <p:nvPr/>
       </p:nvGrpSpPr>
-      <p:grpSpPr/>
+      <p:grpSpPr>
+        <a:xfrm>
+          <a:off x="0" y="0"/>
+          <a:ext cx="0" cy="0"/>
+          <a:chOff x="0" y="0"/>
+          <a:chExt cx="0" cy="0"/>
+        </a:xfrm>
+      </p:grpSpPr>
       <p:sp>
         <p:nvSpPr>
           <p:cNvPr id="2" name="Rectangle 1"/>
@@ -6940,6 +7032,7 @@
           <a:lstStyle/>
           <a:p>
             <a:pPr algn="ctr"/>
+            <a:endParaRPr/>
           </a:p>
         </p:txBody>
       </p:sp>
@@ -6960,7 +7053,7 @@
           <a:noFill/>
         </p:spPr>
         <p:txBody>
-          <a:bodyPr wrap="square" lIns="0" rIns="0" tIns="0" bIns="0">
+          <a:bodyPr wrap="square" lIns="0" tIns="0" rIns="0" bIns="0">
             <a:spAutoFit/>
           </a:bodyPr>
           <a:lstStyle/>
@@ -7018,6 +7111,7 @@
           <a:lstStyle/>
           <a:p>
             <a:pPr algn="ctr"/>
+            <a:endParaRPr/>
           </a:p>
         </p:txBody>
       </p:sp>
@@ -7038,7 +7132,7 @@
           <a:noFill/>
         </p:spPr>
         <p:txBody>
-          <a:bodyPr wrap="square" lIns="0" rIns="0" tIns="0" bIns="0">
+          <a:bodyPr wrap="square" lIns="0" tIns="0" rIns="0" bIns="0">
             <a:spAutoFit/>
           </a:bodyPr>
           <a:lstStyle/>
@@ -7096,6 +7190,7 @@
           <a:lstStyle/>
           <a:p>
             <a:pPr algn="ctr"/>
+            <a:endParaRPr/>
           </a:p>
         </p:txBody>
       </p:sp>
@@ -7116,7 +7211,7 @@
           <a:noFill/>
         </p:spPr>
         <p:txBody>
-          <a:bodyPr wrap="square" lIns="0" rIns="0" tIns="0" bIns="0">
+          <a:bodyPr wrap="square" lIns="0" tIns="0" rIns="0" bIns="0">
             <a:spAutoFit/>
           </a:bodyPr>
           <a:lstStyle/>
@@ -7176,6 +7271,7 @@
           <a:lstStyle/>
           <a:p>
             <a:pPr algn="ctr"/>
+            <a:endParaRPr/>
           </a:p>
         </p:txBody>
       </p:sp>
@@ -7326,6 +7422,7 @@
           <a:lstStyle/>
           <a:p>
             <a:pPr algn="ctr"/>
+            <a:endParaRPr/>
           </a:p>
         </p:txBody>
       </p:sp>
@@ -7346,7 +7443,7 @@
           <a:noFill/>
         </p:spPr>
         <p:txBody>
-          <a:bodyPr wrap="square" lIns="0" rIns="0" tIns="0" bIns="0">
+          <a:bodyPr wrap="square" lIns="0" tIns="0" rIns="0" bIns="0">
             <a:spAutoFit/>
           </a:bodyPr>
           <a:lstStyle/>
@@ -7406,6 +7503,7 @@
           <a:lstStyle/>
           <a:p>
             <a:pPr algn="ctr"/>
+            <a:endParaRPr/>
           </a:p>
         </p:txBody>
       </p:sp>
@@ -7556,6 +7654,7 @@
           <a:lstStyle/>
           <a:p>
             <a:pPr algn="ctr"/>
+            <a:endParaRPr/>
           </a:p>
         </p:txBody>
       </p:sp>
@@ -7576,7 +7675,7 @@
           <a:noFill/>
         </p:spPr>
         <p:txBody>
-          <a:bodyPr wrap="square" lIns="0" rIns="0" tIns="0" bIns="0">
+          <a:bodyPr wrap="square" lIns="0" tIns="0" rIns="0" bIns="0">
             <a:spAutoFit/>
           </a:bodyPr>
           <a:lstStyle/>
@@ -7636,6 +7735,7 @@
           <a:lstStyle/>
           <a:p>
             <a:pPr algn="ctr"/>
+            <a:endParaRPr/>
           </a:p>
         </p:txBody>
       </p:sp>
@@ -7758,6 +7858,7 @@
           <a:lstStyle/>
           <a:p>
             <a:pPr algn="ctr"/>
+            <a:endParaRPr/>
           </a:p>
         </p:txBody>
       </p:sp>
@@ -7778,7 +7879,7 @@
           <a:noFill/>
         </p:spPr>
         <p:txBody>
-          <a:bodyPr wrap="square" lIns="0" rIns="0" tIns="0" bIns="0">
+          <a:bodyPr wrap="square" lIns="0" tIns="0" rIns="0" bIns="0">
             <a:spAutoFit/>
           </a:bodyPr>
           <a:lstStyle/>
@@ -7838,6 +7939,7 @@
           <a:lstStyle/>
           <a:p>
             <a:pPr algn="ctr"/>
+            <a:endParaRPr/>
           </a:p>
         </p:txBody>
       </p:sp>
@@ -7937,7 +8039,7 @@
           <a:noFill/>
         </p:spPr>
         <p:txBody>
-          <a:bodyPr wrap="square" lIns="0" rIns="0" tIns="0" bIns="0">
+          <a:bodyPr wrap="square" lIns="0" tIns="0" rIns="0" bIns="0">
             <a:spAutoFit/>
           </a:bodyPr>
           <a:lstStyle/>
@@ -7972,7 +8074,7 @@
           <a:noFill/>
         </p:spPr>
         <p:txBody>
-          <a:bodyPr wrap="square" lIns="0" rIns="0" tIns="0" bIns="0">
+          <a:bodyPr wrap="square" lIns="0" tIns="0" rIns="0" bIns="0">
             <a:spAutoFit/>
           </a:bodyPr>
           <a:lstStyle/>
@@ -8007,7 +8109,7 @@
           <a:noFill/>
         </p:spPr>
         <p:txBody>
-          <a:bodyPr wrap="square" lIns="0" rIns="0" tIns="0" bIns="0">
+          <a:bodyPr wrap="square" lIns="0" tIns="0" rIns="0" bIns="0">
             <a:spAutoFit/>
           </a:bodyPr>
           <a:lstStyle/>
@@ -8034,7 +8136,7 @@
 </file>
 
 <file path=ppt/slides/slide8.xml><?xml version="1.0" encoding="utf-8"?>
-<p:sld xmlns:a="http://schemas.openxmlformats.org/drawingml/2006/main" xmlns:p="http://schemas.openxmlformats.org/presentationml/2006/main" xmlns:r="http://schemas.openxmlformats.org/officeDocument/2006/relationships">
+<p:sld xmlns:a="http://schemas.openxmlformats.org/drawingml/2006/main" xmlns:r="http://schemas.openxmlformats.org/officeDocument/2006/relationships" xmlns:p="http://schemas.openxmlformats.org/presentationml/2006/main">
   <p:cSld>
     <p:spTree>
       <p:nvGrpSpPr>
@@ -8042,7 +8144,14 @@
         <p:cNvGrpSpPr/>
         <p:nvPr/>
       </p:nvGrpSpPr>
-      <p:grpSpPr/>
+      <p:grpSpPr>
+        <a:xfrm>
+          <a:off x="0" y="0"/>
+          <a:ext cx="0" cy="0"/>
+          <a:chOff x="0" y="0"/>
+          <a:chExt cx="0" cy="0"/>
+        </a:xfrm>
+      </p:grpSpPr>
       <p:sp>
         <p:nvSpPr>
           <p:cNvPr id="2" name="Rectangle 1"/>
@@ -8084,6 +8193,7 @@
           <a:lstStyle/>
           <a:p>
             <a:pPr algn="ctr"/>
+            <a:endParaRPr/>
           </a:p>
         </p:txBody>
       </p:sp>
@@ -8104,7 +8214,7 @@
           <a:noFill/>
         </p:spPr>
         <p:txBody>
-          <a:bodyPr wrap="square" lIns="0" rIns="0" tIns="0" bIns="0">
+          <a:bodyPr wrap="square" lIns="0" tIns="0" rIns="0" bIns="0">
             <a:spAutoFit/>
           </a:bodyPr>
           <a:lstStyle/>
@@ -8139,7 +8249,7 @@
           <a:noFill/>
         </p:spPr>
         <p:txBody>
-          <a:bodyPr wrap="square" lIns="0" rIns="0" tIns="0" bIns="0">
+          <a:bodyPr wrap="square" lIns="0" tIns="0" rIns="0" bIns="0">
             <a:spAutoFit/>
           </a:bodyPr>
           <a:lstStyle/>
@@ -8336,6 +8446,7 @@
           <a:lstStyle/>
           <a:p>
             <a:pPr algn="ctr"/>
+            <a:endParaRPr/>
           </a:p>
         </p:txBody>
       </p:sp>
@@ -8356,7 +8467,7 @@
           <a:noFill/>
         </p:spPr>
         <p:txBody>
-          <a:bodyPr wrap="square" lIns="0" rIns="0" tIns="0" bIns="0">
+          <a:bodyPr wrap="square" lIns="0" tIns="0" rIns="0" bIns="0">
             <a:spAutoFit/>
           </a:bodyPr>
           <a:lstStyle/>
@@ -8391,7 +8502,7 @@
           <a:noFill/>
         </p:spPr>
         <p:txBody>
-          <a:bodyPr wrap="square" lIns="0" rIns="0" tIns="0" bIns="0">
+          <a:bodyPr wrap="square" lIns="0" tIns="0" rIns="0" bIns="0">
             <a:spAutoFit/>
           </a:bodyPr>
           <a:lstStyle/>
@@ -8426,7 +8537,7 @@
           <a:noFill/>
         </p:spPr>
         <p:txBody>
-          <a:bodyPr wrap="square" lIns="0" rIns="0" tIns="0" bIns="0">
+          <a:bodyPr wrap="square" lIns="0" tIns="0" rIns="0" bIns="0">
             <a:spAutoFit/>
           </a:bodyPr>
           <a:lstStyle/>
@@ -8461,7 +8572,7 @@
           <a:noFill/>
         </p:spPr>
         <p:txBody>
-          <a:bodyPr wrap="square" lIns="0" rIns="0" tIns="0" bIns="0">
+          <a:bodyPr wrap="square" lIns="0" tIns="0" rIns="0" bIns="0">
             <a:spAutoFit/>
           </a:bodyPr>
           <a:lstStyle/>

--- a/DemographicReactionEngine.pptx
+++ b/DemographicReactionEngine.pptx
@@ -3232,14 +3232,14 @@
       </p:sp>
       <p:sp>
         <p:nvSpPr>
-          <p:cNvPr id="5" name="TextBox 4"/>
+          <p:cNvPr id="6" name="TextBox 5"/>
           <p:cNvSpPr txBox="1"/>
           <p:nvPr/>
         </p:nvSpPr>
         <p:spPr>
           <a:xfrm>
-            <a:off x="731520" y="1828800"/>
-            <a:ext cx="9144000" cy="457200"/>
+            <a:off x="731520" y="2377440"/>
+            <a:ext cx="10058400" cy="1371600"/>
           </a:xfrm>
           <a:prstGeom prst="rect">
             <a:avLst/>
@@ -3254,27 +3254,27 @@
           <a:p>
             <a:pPr algn="l"/>
             <a:r>
-              <a:rPr sz="1400" b="1">
-                <a:solidFill>
-                  <a:srgbClr val="4FC3F7"/>
-                </a:solidFill>
-                <a:latin typeface="Calibri"/>
-              </a:rPr>
-              <a:t>A PROJECT OVERVIEW</a:t>
-            </a:r>
-          </a:p>
-        </p:txBody>
-      </p:sp>
-      <p:sp>
-        <p:nvSpPr>
-          <p:cNvPr id="6" name="TextBox 5"/>
+              <a:rPr sz="5400" b="1">
+                <a:solidFill>
+                  <a:srgbClr val="FFFFFF"/>
+                </a:solidFill>
+                <a:latin typeface="Calibri"/>
+              </a:rPr>
+              <a:t>Demographic Reaction Engine</a:t>
+            </a:r>
+          </a:p>
+        </p:txBody>
+      </p:sp>
+      <p:sp>
+        <p:nvSpPr>
+          <p:cNvPr id="7" name="TextBox 6"/>
           <p:cNvSpPr txBox="1"/>
           <p:nvPr/>
         </p:nvSpPr>
         <p:spPr>
           <a:xfrm>
-            <a:off x="731520" y="2377440"/>
-            <a:ext cx="10058400" cy="1371600"/>
+            <a:off x="731520" y="3840480"/>
+            <a:ext cx="10058400" cy="914400"/>
           </a:xfrm>
           <a:prstGeom prst="rect">
             <a:avLst/>
@@ -3289,27 +3289,27 @@
           <a:p>
             <a:pPr algn="l"/>
             <a:r>
-              <a:rPr sz="5400" b="1">
-                <a:solidFill>
-                  <a:srgbClr val="FFFFFF"/>
-                </a:solidFill>
-                <a:latin typeface="Calibri"/>
-              </a:rPr>
-              <a:t>Demographic Reaction Engine</a:t>
-            </a:r>
-          </a:p>
-        </p:txBody>
-      </p:sp>
-      <p:sp>
-        <p:nvSpPr>
-          <p:cNvPr id="7" name="TextBox 6"/>
+              <a:rPr sz="2200" b="0">
+                <a:solidFill>
+                  <a:srgbClr val="F5F7FA"/>
+                </a:solidFill>
+                <a:latin typeface="Calibri"/>
+              </a:rPr>
+              <a:t>Pre-test your pitch on a synthetic America before you ship it.</a:t>
+            </a:r>
+          </a:p>
+        </p:txBody>
+      </p:sp>
+      <p:sp>
+        <p:nvSpPr>
+          <p:cNvPr id="9" name="TextBox 8"/>
           <p:cNvSpPr txBox="1"/>
           <p:nvPr/>
         </p:nvSpPr>
         <p:spPr>
           <a:xfrm>
-            <a:off x="731520" y="3840480"/>
-            <a:ext cx="10058400" cy="914400"/>
+            <a:off x="731520" y="5100000"/>
+            <a:ext cx="10058400" cy="769441"/>
           </a:xfrm>
           <a:prstGeom prst="rect">
             <a:avLst/>
@@ -3324,13 +3324,43 @@
           <a:p>
             <a:pPr algn="l"/>
             <a:r>
-              <a:rPr sz="2200" b="0">
+              <a:rPr sz="1400" b="1" dirty="0">
                 <a:solidFill>
                   <a:srgbClr val="F5F7FA"/>
                 </a:solidFill>
                 <a:latin typeface="Calibri"/>
               </a:rPr>
-              <a:t>Pre-test your pitch on a synthetic America before you ship it.</a:t>
+              <a:t>Presented by</a:t>
+            </a:r>
+          </a:p>
+          <a:p>
+            <a:pPr algn="l"/>
+            <a:r>
+              <a:rPr sz="1800" b="0">
+                <a:solidFill>
+                  <a:srgbClr val="4FC3F7"/>
+                </a:solidFill>
+                <a:latin typeface="Calibri"/>
+              </a:rPr>
+              <a:t>Amol Behrani   </a:t>
+            </a:r>
+            <a:endParaRPr lang="en-US" sz="1800" b="0">
+              <a:solidFill>
+                <a:srgbClr val="4FC3F7"/>
+              </a:solidFill>
+              <a:latin typeface="Calibri"/>
+            </a:endParaRPr>
+          </a:p>
+          <a:p>
+            <a:pPr algn="l"/>
+            <a:r>
+              <a:rPr sz="1800" b="0" dirty="0">
+                <a:solidFill>
+                  <a:srgbClr val="4FC3F7"/>
+                </a:solidFill>
+                <a:latin typeface="Calibri"/>
+              </a:rPr>
+              <a:t>Reena Agrawal</a:t>
             </a:r>
           </a:p>
         </p:txBody>
